--- a/docs/project-guide/cen207-project-guide-slides.tr.pptx
+++ b/docs/project-guide/cen207-project-guide-slides.tr.pptx
@@ -12635,7 +12635,7 @@
                   <a:srgbClr val="1F2D3A"/>
                 </a:solidFill>
               </a:rPr>
-              <a:t>Seçiminizi Microsoft Teams'teki </a:t>
+              <a:t>Seçiminizi paylaşılan </a:t>
             </a:r>
             <a:r>
               <a:rPr sz="2000" b="1">
@@ -12643,7 +12643,7 @@
                   <a:srgbClr val="1F2D3A"/>
                 </a:solidFill>
               </a:rPr>
-              <a:t>takım ve konu tablosuna</a:t>
+              <a:t>takım ve konu listesine</a:t>
             </a:r>
             <a:r>
               <a:rPr sz="2000" b="0">
@@ -12651,7 +12651,7 @@
                   <a:srgbClr val="1F2D3A"/>
                 </a:solidFill>
               </a:rPr>
-              <a:t> yazın — bir konuyu bir takım alır, ilk yazan alır</a:t>
+              <a:t> yazın (bağlantı Teams duyurusunda) — bir konuyu bir takım alır, ilk yazan alır</a:t>
             </a:r>
           </a:p>
           <a:p>
@@ -16910,7 +16910,7 @@
                   <a:srgbClr val="1F2D3A"/>
                 </a:solidFill>
               </a:rPr>
-              <a:t> en çok 3 kişi (tek başınıza da olur)</a:t>
+              <a:t> en çok 5 kişi (tek başınıza da olur)</a:t>
             </a:r>
           </a:p>
           <a:p>
@@ -26761,7 +26761,7 @@
                   <a:srgbClr val="1F2D3A"/>
                 </a:solidFill>
               </a:rPr>
-              <a:t>İki kişilik takım yerine tek başıma çalışabilir miyim?</a:t>
+              <a:t>Takım yerine tek başıma çalışabilir miyim?</a:t>
             </a:r>
             <a:r>
               <a:rPr sz="2000" b="0">
@@ -26769,7 +26769,7 @@
                   <a:srgbClr val="1F2D3A"/>
                 </a:solidFill>
               </a:rPr>
-              <a:t> Evet — en çok 3 kişi, tek başına çalışmaya izin var. Takımlar 3. hafta sonunda kesinleşir.</a:t>
+              <a:t> Evet — en çok 5 kişi, tek başına çalışmaya izin var. Takımlar 3. hafta sonunda kesinleşir.</a:t>
             </a:r>
           </a:p>
         </p:txBody>
